--- a/public/fun/pack/pptx/talkpro/발표템플릿프리미엄_15_연말결산·회고_에메랄드브라스.pptx
+++ b/public/fun/pack/pptx/talkpro/발표템플릿프리미엄_15_연말결산·회고_에메랄드브라스.pptx
@@ -115,12 +115,12 @@
   <p:extLst>
     <p:ext uri="{521415D9-36F7-43E2-AB2F-B90AF26B5E84}">
       <p14:sectionLst xmlns:p14="http://schemas.microsoft.com/office/powerpoint/2010/main">
-        <p14:section name="시작" id="{8AAEFD56-EB16-491A-BCF8-AD63A14552E8}">
+        <p14:section name="시작" id="{7C4DF345-63E2-496D-94A4-88A767100BD0}">
           <p14:sldIdLst>
             <p14:sldId id="256"/>
           </p14:sldIdLst>
         </p14:section>
-        <p14:section name="본문" id="{1D5C25CA-83B4-404C-AF84-76D18FD61A7D}">
+        <p14:section name="본문" id="{EBC43114-8DBF-41F7-978F-1E810A6D8E97}">
           <p14:sldIdLst>
             <p14:sldId id="257"/>
             <p14:sldId id="258"/>
@@ -131,7 +131,7 @@
             <p14:sldId id="263"/>
           </p14:sldIdLst>
         </p14:section>
-        <p14:section name="마무리" id="{11ECA059-FB59-4A65-83F1-80A5066A3AF4}">
+        <p14:section name="마무리" id="{D01C3B39-5A85-444B-A9B1-5E3AD5CB6DD3}">
           <p14:sldIdLst>
             <p14:sldId id="264"/>
           </p14:sldIdLst>
@@ -1877,7 +1877,7 @@
             </a:lvl1pPr>
           </a:lstStyle>
           <a:p>
-            <a:fld id="{4627C8DF-0498-4781-9FC6-977453579252}" type="slidenum">
+            <a:fld id="{80C51666-3DD5-4BA3-B905-810BE988295C}" type="slidenum">
               <a:rPr lang="en-US"/>
               <a:t>‹#›</a:t>
             </a:fld>
@@ -2860,7 +2860,7 @@
             </a:lvl1pPr>
           </a:lstStyle>
           <a:p>
-            <a:fld id="{5F4565F0-04AA-445B-B168-AF5C49B83D39}" type="slidenum">
+            <a:fld id="{C53DECB7-6850-41DC-8D7B-69C93B61BB1E}" type="slidenum">
               <a:rPr lang="en-US"/>
               <a:t>‹#›</a:t>
             </a:fld>
@@ -3870,7 +3870,7 @@
             </a:lvl1pPr>
           </a:lstStyle>
           <a:p>
-            <a:fld id="{B08A0A84-D2A5-4B12-8A22-419DA5A5EB1C}" type="slidenum">
+            <a:fld id="{28ECAB7A-3E6B-470E-AECD-B93F02809B7D}" type="slidenum">
               <a:rPr lang="en-US"/>
               <a:t>‹#›</a:t>
             </a:fld>
@@ -5011,7 +5011,7 @@
           <a:p>
             <a:r>
               <a:rPr lang="ko-KR"/>
-              <a:t>봄에 세운 목표를 지금 기준으로 다시 봅니다</a:t>
+              <a:t>처음에 세운 목표를 지금 기준으로 다시 봅니다</a:t>
             </a:r>
           </a:p>
         </p:txBody>
@@ -5039,7 +5039,7 @@
           <a:p>
             <a:r>
               <a:rPr lang="ko-KR"/>
-              <a:t>0000. 00. 00</a:t>
+              <a:t>날짜 입력</a:t>
             </a:r>
           </a:p>
         </p:txBody>
@@ -5124,7 +5124,7 @@
           <a:bodyPr/>
           <a:lstStyle/>
           <a:p>
-            <a:fld id="{66CED2F0-8B1F-4F36-B1CD-3EECC4488728}" type="slidenum">
+            <a:fld id="{7E6C20DD-3E3F-4C48-92CF-9DB98021F5A5}" type="slidenum">
               <a:rPr lang="en-US"/>
               <a:t>‹#›</a:t>
             </a:fld>
@@ -6238,7 +6238,7 @@
           <a:bodyPr/>
           <a:lstStyle/>
           <a:p>
-            <a:fld id="{9F0A934A-4C9F-4E58-BDDA-479DE60299CE}" type="slidenum">
+            <a:fld id="{3303337F-21B2-429C-860A-0CCE934D7105}" type="slidenum">
               <a:rPr lang="en-US"/>
               <a:t>‹#›</a:t>
             </a:fld>
@@ -6326,7 +6326,7 @@
           <a:bodyPr/>
           <a:lstStyle/>
           <a:p>
-            <a:fld id="{DB4E5D63-4A6B-438D-A041-1FA53CA5EC50}" type="slidenum">
+            <a:fld id="{F07D4D94-D056-49E2-AFD4-64CE40DF8839}" type="slidenum">
               <a:rPr lang="en-US"/>
               <a:t>‹#›</a:t>
             </a:fld>
@@ -7233,7 +7233,7 @@
           <a:bodyPr/>
           <a:lstStyle/>
           <a:p>
-            <a:fld id="{5368DDD5-32F1-4DAC-A3FF-22478B952404}" type="slidenum">
+            <a:fld id="{A2D39327-8D2A-4089-93F7-9F3E6C39C7F4}" type="slidenum">
               <a:rPr lang="en-US"/>
               <a:t>‹#›</a:t>
             </a:fld>
@@ -7837,7 +7837,7 @@
           <a:bodyPr/>
           <a:lstStyle/>
           <a:p>
-            <a:fld id="{22D32166-59F8-4EEA-9EAC-3F483137CFE2}" type="slidenum">
+            <a:fld id="{0140F341-5621-4382-B724-1267D5739254}" type="slidenum">
               <a:rPr lang="en-US"/>
               <a:t>‹#›</a:t>
             </a:fld>
@@ -8017,7 +8017,7 @@
           <a:bodyPr/>
           <a:lstStyle/>
           <a:p>
-            <a:fld id="{D1714DF8-F079-41F7-A094-C6A886DE6A0E}" type="slidenum">
+            <a:fld id="{95641304-763D-4E4B-AD46-D4CCECC7C886}" type="slidenum">
               <a:rPr lang="en-US"/>
               <a:t>‹#›</a:t>
             </a:fld>
@@ -9081,7 +9081,7 @@
           <a:bodyPr/>
           <a:lstStyle/>
           <a:p>
-            <a:fld id="{CB68AFE2-65CE-47EB-A45D-41A4316BDB37}" type="slidenum">
+            <a:fld id="{B6EF8BF8-F132-4768-B5F7-E212F5D9C9F6}" type="slidenum">
               <a:rPr lang="en-US"/>
               <a:t>‹#›</a:t>
             </a:fld>
